--- a/Records/Literacture review-followup.pptx
+++ b/Records/Literacture review-followup.pptx
@@ -168,426 +168,29 @@
 </p:presentation>
 </file>
 
-<file path=ppt/revisionInfo.xml><?xml version="1.0" encoding="utf-8"?>
-<p1510:revInfo xmlns:a="http://schemas.openxmlformats.org/drawingml/2006/main" xmlns:r="http://schemas.openxmlformats.org/officeDocument/2006/relationships" xmlns:p1510="http://schemas.microsoft.com/office/powerpoint/2015/10/main">
-  <p1510:revLst>
-    <p1510:client id="{CC48AA1C-DB7B-3442-82FB-804407DDEFDC}" v="67" dt="2026-06-30T14:25:46.361"/>
-  </p1510:revLst>
-</p1510:revInfo>
-</file>
-
 <file path=ppt/changesInfos/changesInfo1.xml><?xml version="1.0" encoding="utf-8"?>
 <pc:chgInfo xmlns:a="http://schemas.openxmlformats.org/drawingml/2006/main" xmlns:r="http://schemas.openxmlformats.org/officeDocument/2006/relationships" xmlns:ac="http://schemas.microsoft.com/office/drawing/2013/main/command" xmlns:pc="http://schemas.microsoft.com/office/powerpoint/2013/main/command">
   <pc:docChgLst>
     <pc:chgData name="耀泉 马" userId="19e30af8d5659de2" providerId="LiveId" clId="{C3594856-CEDA-5129-B2AF-7962E3CA4CA3}"/>
     <pc:docChg chg="undo custSel addSld delSld modSld sldOrd addSection delSection modSection">
-      <pc:chgData name="耀泉 马" userId="19e30af8d5659de2" providerId="LiveId" clId="{C3594856-CEDA-5129-B2AF-7962E3CA4CA3}" dt="2026-06-30T14:25:46.361" v="7016" actId="20578"/>
+      <pc:chgData name="耀泉 马" userId="19e30af8d5659de2" providerId="LiveId" clId="{C3594856-CEDA-5129-B2AF-7962E3CA4CA3}" dt="2026-08-04T13:21:19.567" v="7017" actId="1076"/>
       <pc:docMkLst>
         <pc:docMk/>
       </pc:docMkLst>
-      <pc:sldChg chg="modSp mod ord modShow">
-        <pc:chgData name="耀泉 马" userId="19e30af8d5659de2" providerId="LiveId" clId="{C3594856-CEDA-5129-B2AF-7962E3CA4CA3}" dt="2026-06-24T01:56:32.788" v="3943" actId="34476"/>
-        <pc:sldMkLst>
-          <pc:docMk/>
-          <pc:sldMk cId="2621794148" sldId="257"/>
-        </pc:sldMkLst>
-      </pc:sldChg>
-      <pc:sldChg chg="delSp modSp new mod">
-        <pc:chgData name="耀泉 马" userId="19e30af8d5659de2" providerId="LiveId" clId="{C3594856-CEDA-5129-B2AF-7962E3CA4CA3}" dt="2026-06-30T10:06:35.070" v="6837" actId="27636"/>
-        <pc:sldMkLst>
-          <pc:docMk/>
-          <pc:sldMk cId="2290997006" sldId="259"/>
-        </pc:sldMkLst>
-        <pc:spChg chg="mod">
-          <ac:chgData name="耀泉 马" userId="19e30af8d5659de2" providerId="LiveId" clId="{C3594856-CEDA-5129-B2AF-7962E3CA4CA3}" dt="2026-06-30T10:06:35.070" v="6837" actId="27636"/>
-          <ac:spMkLst>
-            <pc:docMk/>
-            <pc:sldMk cId="2290997006" sldId="259"/>
-            <ac:spMk id="3" creationId="{21F482A8-7823-7754-9344-36EA99AB2D06}"/>
-          </ac:spMkLst>
-        </pc:spChg>
-      </pc:sldChg>
-      <pc:sldChg chg="modSp new mod ord modShow">
-        <pc:chgData name="耀泉 马" userId="19e30af8d5659de2" providerId="LiveId" clId="{C3594856-CEDA-5129-B2AF-7962E3CA4CA3}" dt="2026-06-24T01:56:32.788" v="3943" actId="34476"/>
-        <pc:sldMkLst>
-          <pc:docMk/>
-          <pc:sldMk cId="4138975813" sldId="260"/>
-        </pc:sldMkLst>
-        <pc:spChg chg="mod">
-          <ac:chgData name="耀泉 马" userId="19e30af8d5659de2" providerId="LiveId" clId="{C3594856-CEDA-5129-B2AF-7962E3CA4CA3}" dt="2026-06-08T10:18:11.467" v="3089" actId="20577"/>
-          <ac:spMkLst>
-            <pc:docMk/>
-            <pc:sldMk cId="4138975813" sldId="260"/>
-            <ac:spMk id="3" creationId="{8F04DE2E-D81A-FC94-4DA8-8CE8BD15DED1}"/>
-          </ac:spMkLst>
-        </pc:spChg>
-      </pc:sldChg>
-      <pc:sldChg chg="modSp new mod ord modShow">
-        <pc:chgData name="耀泉 马" userId="19e30af8d5659de2" providerId="LiveId" clId="{C3594856-CEDA-5129-B2AF-7962E3CA4CA3}" dt="2026-06-24T01:56:32.788" v="3943" actId="34476"/>
-        <pc:sldMkLst>
-          <pc:docMk/>
-          <pc:sldMk cId="3186421945" sldId="261"/>
-        </pc:sldMkLst>
-        <pc:spChg chg="mod">
-          <ac:chgData name="耀泉 马" userId="19e30af8d5659de2" providerId="LiveId" clId="{C3594856-CEDA-5129-B2AF-7962E3CA4CA3}" dt="2026-06-08T08:46:38.316" v="3050" actId="21"/>
-          <ac:spMkLst>
-            <pc:docMk/>
-            <pc:sldMk cId="3186421945" sldId="261"/>
-            <ac:spMk id="3" creationId="{27F09DC5-3A9E-91B2-7AC9-A3742F077DAE}"/>
-          </ac:spMkLst>
-        </pc:spChg>
-      </pc:sldChg>
-      <pc:sldChg chg="add">
-        <pc:chgData name="耀泉 马" userId="19e30af8d5659de2" providerId="LiveId" clId="{C3594856-CEDA-5129-B2AF-7962E3CA4CA3}" dt="2026-06-23T15:26:27.346" v="3546"/>
-        <pc:sldMkLst>
-          <pc:docMk/>
-          <pc:sldMk cId="1868540481" sldId="265"/>
-        </pc:sldMkLst>
-      </pc:sldChg>
-      <pc:sldChg chg="add">
-        <pc:chgData name="耀泉 马" userId="19e30af8d5659de2" providerId="LiveId" clId="{C3594856-CEDA-5129-B2AF-7962E3CA4CA3}" dt="2026-06-23T15:26:27.346" v="3546"/>
-        <pc:sldMkLst>
-          <pc:docMk/>
-          <pc:sldMk cId="3190719270" sldId="267"/>
-        </pc:sldMkLst>
-      </pc:sldChg>
-      <pc:sldChg chg="add">
-        <pc:chgData name="耀泉 马" userId="19e30af8d5659de2" providerId="LiveId" clId="{C3594856-CEDA-5129-B2AF-7962E3CA4CA3}" dt="2026-06-23T15:26:27.346" v="3546"/>
-        <pc:sldMkLst>
-          <pc:docMk/>
-          <pc:sldMk cId="2112930540" sldId="268"/>
-        </pc:sldMkLst>
-      </pc:sldChg>
-      <pc:sldChg chg="addSp delSp modSp add mod modNotesTx">
-        <pc:chgData name="耀泉 马" userId="19e30af8d5659de2" providerId="LiveId" clId="{C3594856-CEDA-5129-B2AF-7962E3CA4CA3}" dt="2026-06-30T10:44:32.210" v="6874" actId="20577"/>
-        <pc:sldMkLst>
-          <pc:docMk/>
-          <pc:sldMk cId="1166682950" sldId="269"/>
-        </pc:sldMkLst>
-        <pc:spChg chg="mod">
-          <ac:chgData name="耀泉 马" userId="19e30af8d5659de2" providerId="LiveId" clId="{C3594856-CEDA-5129-B2AF-7962E3CA4CA3}" dt="2026-06-24T01:48:42.583" v="3892" actId="20577"/>
-          <ac:spMkLst>
-            <pc:docMk/>
-            <pc:sldMk cId="1166682950" sldId="269"/>
-            <ac:spMk id="2" creationId="{20E56253-1225-28D3-AE49-6350DFCF1E16}"/>
-          </ac:spMkLst>
-        </pc:spChg>
-        <pc:graphicFrameChg chg="add mod ord modGraphic">
-          <ac:chgData name="耀泉 马" userId="19e30af8d5659de2" providerId="LiveId" clId="{C3594856-CEDA-5129-B2AF-7962E3CA4CA3}" dt="2026-06-30T06:56:14.119" v="5957" actId="20577"/>
-          <ac:graphicFrameMkLst>
-            <pc:docMk/>
-            <pc:sldMk cId="1166682950" sldId="269"/>
-            <ac:graphicFrameMk id="10" creationId="{B631E433-B7DC-20F5-BDB8-5FFC5DFB35B0}"/>
-          </ac:graphicFrameMkLst>
-        </pc:graphicFrameChg>
-      </pc:sldChg>
-      <pc:sldChg chg="modSp new mod">
-        <pc:chgData name="耀泉 马" userId="19e30af8d5659de2" providerId="LiveId" clId="{C3594856-CEDA-5129-B2AF-7962E3CA4CA3}" dt="2026-06-23T23:47:16.405" v="3698"/>
-        <pc:sldMkLst>
-          <pc:docMk/>
-          <pc:sldMk cId="2672122693" sldId="270"/>
-        </pc:sldMkLst>
-        <pc:spChg chg="mod">
-          <ac:chgData name="耀泉 马" userId="19e30af8d5659de2" providerId="LiveId" clId="{C3594856-CEDA-5129-B2AF-7962E3CA4CA3}" dt="2026-06-23T23:41:36.505" v="3613"/>
-          <ac:spMkLst>
-            <pc:docMk/>
-            <pc:sldMk cId="2672122693" sldId="270"/>
-            <ac:spMk id="2" creationId="{152DB0DE-3E87-978D-3FA2-7EB999849C3B}"/>
-          </ac:spMkLst>
-        </pc:spChg>
-        <pc:spChg chg="mod">
-          <ac:chgData name="耀泉 马" userId="19e30af8d5659de2" providerId="LiveId" clId="{C3594856-CEDA-5129-B2AF-7962E3CA4CA3}" dt="2026-06-23T23:46:54.475" v="3697" actId="20577"/>
-          <ac:spMkLst>
-            <pc:docMk/>
-            <pc:sldMk cId="2672122693" sldId="270"/>
-            <ac:spMk id="3" creationId="{4EDADF3A-A897-EF56-200A-C51EA0241D5A}"/>
-          </ac:spMkLst>
-        </pc:spChg>
-        <pc:spChg chg="mod">
-          <ac:chgData name="耀泉 马" userId="19e30af8d5659de2" providerId="LiveId" clId="{C3594856-CEDA-5129-B2AF-7962E3CA4CA3}" dt="2026-06-23T23:47:16.405" v="3698"/>
-          <ac:spMkLst>
-            <pc:docMk/>
-            <pc:sldMk cId="2672122693" sldId="270"/>
-            <ac:spMk id="4" creationId="{C942C2E9-1980-DE28-BD7D-FD75F8B97B49}"/>
-          </ac:spMkLst>
-        </pc:spChg>
-      </pc:sldChg>
-      <pc:sldChg chg="modSp add mod">
-        <pc:chgData name="耀泉 马" userId="19e30af8d5659de2" providerId="LiveId" clId="{C3594856-CEDA-5129-B2AF-7962E3CA4CA3}" dt="2026-06-24T01:55:53.758" v="3942" actId="20577"/>
-        <pc:sldMkLst>
-          <pc:docMk/>
-          <pc:sldMk cId="3929797536" sldId="271"/>
-        </pc:sldMkLst>
-        <pc:spChg chg="mod">
-          <ac:chgData name="耀泉 马" userId="19e30af8d5659de2" providerId="LiveId" clId="{C3594856-CEDA-5129-B2AF-7962E3CA4CA3}" dt="2026-06-24T01:55:53.758" v="3942" actId="20577"/>
-          <ac:spMkLst>
-            <pc:docMk/>
-            <pc:sldMk cId="3929797536" sldId="271"/>
-            <ac:spMk id="2" creationId="{E9C65EE4-EBFB-6CC9-B51A-03C82DDDCB06}"/>
-          </ac:spMkLst>
-        </pc:spChg>
-      </pc:sldChg>
-      <pc:sldChg chg="modSp add mod">
-        <pc:chgData name="耀泉 马" userId="19e30af8d5659de2" providerId="LiveId" clId="{C3594856-CEDA-5129-B2AF-7962E3CA4CA3}" dt="2026-06-30T11:02:25.068" v="6892" actId="20577"/>
-        <pc:sldMkLst>
-          <pc:docMk/>
-          <pc:sldMk cId="3417823520" sldId="272"/>
-        </pc:sldMkLst>
-        <pc:spChg chg="mod">
-          <ac:chgData name="耀泉 马" userId="19e30af8d5659de2" providerId="LiveId" clId="{C3594856-CEDA-5129-B2AF-7962E3CA4CA3}" dt="2026-06-24T01:48:46.559" v="3896" actId="20577"/>
-          <ac:spMkLst>
-            <pc:docMk/>
-            <pc:sldMk cId="3417823520" sldId="272"/>
-            <ac:spMk id="2" creationId="{4342E1B2-3CBD-6234-30FE-114832EA0415}"/>
-          </ac:spMkLst>
-        </pc:spChg>
-        <pc:graphicFrameChg chg="mod modGraphic">
-          <ac:chgData name="耀泉 马" userId="19e30af8d5659de2" providerId="LiveId" clId="{C3594856-CEDA-5129-B2AF-7962E3CA4CA3}" dt="2026-06-30T11:02:25.068" v="6892" actId="20577"/>
-          <ac:graphicFrameMkLst>
-            <pc:docMk/>
-            <pc:sldMk cId="3417823520" sldId="272"/>
-            <ac:graphicFrameMk id="10" creationId="{0245C92B-A193-1D64-635E-503E3033EF64}"/>
-          </ac:graphicFrameMkLst>
-        </pc:graphicFrameChg>
-      </pc:sldChg>
-      <pc:sldChg chg="modSp add mod modNotesTx">
-        <pc:chgData name="耀泉 马" userId="19e30af8d5659de2" providerId="LiveId" clId="{C3594856-CEDA-5129-B2AF-7962E3CA4CA3}" dt="2026-06-30T12:03:09.683" v="6994" actId="20577"/>
-        <pc:sldMkLst>
-          <pc:docMk/>
-          <pc:sldMk cId="2193795063" sldId="273"/>
-        </pc:sldMkLst>
-        <pc:spChg chg="mod">
-          <ac:chgData name="耀泉 马" userId="19e30af8d5659de2" providerId="LiveId" clId="{C3594856-CEDA-5129-B2AF-7962E3CA4CA3}" dt="2026-06-24T01:48:50.072" v="3900" actId="20577"/>
-          <ac:spMkLst>
-            <pc:docMk/>
-            <pc:sldMk cId="2193795063" sldId="273"/>
-            <ac:spMk id="2" creationId="{F0C33540-61D0-4173-C6CA-19A1B3E62A09}"/>
-          </ac:spMkLst>
-        </pc:spChg>
-        <pc:graphicFrameChg chg="mod modGraphic">
-          <ac:chgData name="耀泉 马" userId="19e30af8d5659de2" providerId="LiveId" clId="{C3594856-CEDA-5129-B2AF-7962E3CA4CA3}" dt="2026-06-24T13:25:07.292" v="4710" actId="20577"/>
-          <ac:graphicFrameMkLst>
-            <pc:docMk/>
-            <pc:sldMk cId="2193795063" sldId="273"/>
-            <ac:graphicFrameMk id="10" creationId="{F91321FB-9101-E648-1EBE-2A17519DD438}"/>
-          </ac:graphicFrameMkLst>
-        </pc:graphicFrameChg>
-      </pc:sldChg>
-      <pc:sldChg chg="modSp add mod">
-        <pc:chgData name="耀泉 马" userId="19e30af8d5659de2" providerId="LiveId" clId="{C3594856-CEDA-5129-B2AF-7962E3CA4CA3}" dt="2026-06-24T13:25:21.295" v="4712" actId="20577"/>
-        <pc:sldMkLst>
-          <pc:docMk/>
-          <pc:sldMk cId="2397392965" sldId="274"/>
-        </pc:sldMkLst>
-        <pc:spChg chg="mod">
-          <ac:chgData name="耀泉 马" userId="19e30af8d5659de2" providerId="LiveId" clId="{C3594856-CEDA-5129-B2AF-7962E3CA4CA3}" dt="2026-06-24T01:48:54.334" v="3904" actId="20577"/>
-          <ac:spMkLst>
-            <pc:docMk/>
-            <pc:sldMk cId="2397392965" sldId="274"/>
-            <ac:spMk id="2" creationId="{7EFBBF97-492F-15A3-4FE4-A6FD40273145}"/>
-          </ac:spMkLst>
-        </pc:spChg>
-        <pc:graphicFrameChg chg="mod modGraphic">
-          <ac:chgData name="耀泉 马" userId="19e30af8d5659de2" providerId="LiveId" clId="{C3594856-CEDA-5129-B2AF-7962E3CA4CA3}" dt="2026-06-24T13:25:21.295" v="4712" actId="20577"/>
-          <ac:graphicFrameMkLst>
-            <pc:docMk/>
-            <pc:sldMk cId="2397392965" sldId="274"/>
-            <ac:graphicFrameMk id="10" creationId="{8584577C-DA11-81F2-4273-1F74575E0F60}"/>
-          </ac:graphicFrameMkLst>
-        </pc:graphicFrameChg>
-      </pc:sldChg>
       <pc:sldChg chg="addSp delSp modSp new mod ord modNotesTx">
-        <pc:chgData name="耀泉 马" userId="19e30af8d5659de2" providerId="LiveId" clId="{C3594856-CEDA-5129-B2AF-7962E3CA4CA3}" dt="2026-06-30T10:56:54.722" v="6891" actId="20577"/>
-        <pc:sldMkLst>
-          <pc:docMk/>
-          <pc:sldMk cId="497191526" sldId="275"/>
-        </pc:sldMkLst>
-        <pc:spChg chg="mod">
-          <ac:chgData name="耀泉 马" userId="19e30af8d5659de2" providerId="LiveId" clId="{C3594856-CEDA-5129-B2AF-7962E3CA4CA3}" dt="2026-06-24T01:59:36.650" v="4005" actId="20577"/>
-          <ac:spMkLst>
-            <pc:docMk/>
-            <pc:sldMk cId="497191526" sldId="275"/>
-            <ac:spMk id="2" creationId="{F2B0B489-2C50-AC2E-9C89-EAD07D82D7C2}"/>
-          </ac:spMkLst>
-        </pc:spChg>
-        <pc:spChg chg="add mod">
-          <ac:chgData name="耀泉 马" userId="19e30af8d5659de2" providerId="LiveId" clId="{C3594856-CEDA-5129-B2AF-7962E3CA4CA3}" dt="2026-06-24T02:01:02.957" v="4010" actId="14100"/>
-          <ac:spMkLst>
-            <pc:docMk/>
-            <pc:sldMk cId="497191526" sldId="275"/>
-            <ac:spMk id="7" creationId="{1922252E-2022-2E9B-5941-BB5C00BBE8B6}"/>
-          </ac:spMkLst>
-        </pc:spChg>
-        <pc:picChg chg="add mod">
-          <ac:chgData name="耀泉 马" userId="19e30af8d5659de2" providerId="LiveId" clId="{C3594856-CEDA-5129-B2AF-7962E3CA4CA3}" dt="2026-06-24T01:59:41.158" v="4006" actId="1076"/>
-          <ac:picMkLst>
-            <pc:docMk/>
-            <pc:sldMk cId="497191526" sldId="275"/>
-            <ac:picMk id="5" creationId="{175CE7D6-33CB-62FD-CE37-D17A77DC6539}"/>
-          </ac:picMkLst>
-        </pc:picChg>
-      </pc:sldChg>
-      <pc:sldChg chg="addSp delSp modSp new mod ord modNotesTx">
-        <pc:chgData name="耀泉 马" userId="19e30af8d5659de2" providerId="LiveId" clId="{C3594856-CEDA-5129-B2AF-7962E3CA4CA3}" dt="2026-06-30T12:46:17.887" v="6995" actId="20578"/>
+        <pc:chgData name="耀泉 马" userId="19e30af8d5659de2" providerId="LiveId" clId="{C3594856-CEDA-5129-B2AF-7962E3CA4CA3}" dt="2026-08-04T13:21:19.567" v="7017" actId="1076"/>
         <pc:sldMkLst>
           <pc:docMk/>
           <pc:sldMk cId="290400329" sldId="276"/>
         </pc:sldMkLst>
-        <pc:spChg chg="mod">
-          <ac:chgData name="耀泉 马" userId="19e30af8d5659de2" providerId="LiveId" clId="{C3594856-CEDA-5129-B2AF-7962E3CA4CA3}" dt="2026-06-24T08:27:52.003" v="4273" actId="20577"/>
-          <ac:spMkLst>
-            <pc:docMk/>
-            <pc:sldMk cId="290400329" sldId="276"/>
-            <ac:spMk id="2" creationId="{E6F04C8C-CFC1-3A57-E942-7158372B98BD}"/>
-          </ac:spMkLst>
-        </pc:spChg>
-        <pc:spChg chg="add mod">
-          <ac:chgData name="耀泉 马" userId="19e30af8d5659de2" providerId="LiveId" clId="{C3594856-CEDA-5129-B2AF-7962E3CA4CA3}" dt="2026-06-30T07:30:49.766" v="6068" actId="20577"/>
-          <ac:spMkLst>
-            <pc:docMk/>
-            <pc:sldMk cId="290400329" sldId="276"/>
-            <ac:spMk id="7" creationId="{2C277453-62C5-D513-A72C-ECC353F60FEC}"/>
-          </ac:spMkLst>
-        </pc:spChg>
         <pc:picChg chg="add mod ord">
-          <ac:chgData name="耀泉 马" userId="19e30af8d5659de2" providerId="LiveId" clId="{C3594856-CEDA-5129-B2AF-7962E3CA4CA3}" dt="2026-06-24T08:41:50.065" v="4292" actId="14100"/>
+          <ac:chgData name="耀泉 马" userId="19e30af8d5659de2" providerId="LiveId" clId="{C3594856-CEDA-5129-B2AF-7962E3CA4CA3}" dt="2026-08-04T13:21:19.567" v="7017" actId="1076"/>
           <ac:picMkLst>
             <pc:docMk/>
             <pc:sldMk cId="290400329" sldId="276"/>
             <ac:picMk id="6" creationId="{D503E789-0E6C-5B3F-A111-0DA22162E5E7}"/>
           </ac:picMkLst>
         </pc:picChg>
-      </pc:sldChg>
-      <pc:sldChg chg="addSp delSp modSp new mod ord modNotesTx">
-        <pc:chgData name="耀泉 马" userId="19e30af8d5659de2" providerId="LiveId" clId="{C3594856-CEDA-5129-B2AF-7962E3CA4CA3}" dt="2026-06-30T11:16:23.441" v="6895" actId="12"/>
-        <pc:sldMkLst>
-          <pc:docMk/>
-          <pc:sldMk cId="3357630599" sldId="277"/>
-        </pc:sldMkLst>
-        <pc:spChg chg="mod">
-          <ac:chgData name="耀泉 马" userId="19e30af8d5659de2" providerId="LiveId" clId="{C3594856-CEDA-5129-B2AF-7962E3CA4CA3}" dt="2026-06-24T09:17:19.899" v="4520" actId="1076"/>
-          <ac:spMkLst>
-            <pc:docMk/>
-            <pc:sldMk cId="3357630599" sldId="277"/>
-            <ac:spMk id="2" creationId="{C1C5F2E3-35C1-E8F3-4BCE-00822C4B620A}"/>
-          </ac:spMkLst>
-        </pc:spChg>
-        <pc:spChg chg="mod">
-          <ac:chgData name="耀泉 马" userId="19e30af8d5659de2" providerId="LiveId" clId="{C3594856-CEDA-5129-B2AF-7962E3CA4CA3}" dt="2026-06-30T07:02:38.728" v="5979" actId="20577"/>
-          <ac:spMkLst>
-            <pc:docMk/>
-            <pc:sldMk cId="3357630599" sldId="277"/>
-            <ac:spMk id="3" creationId="{9AAE8A98-549D-53AF-021A-D36A2EC758C3}"/>
-          </ac:spMkLst>
-        </pc:spChg>
-        <pc:spChg chg="add mod">
-          <ac:chgData name="耀泉 马" userId="19e30af8d5659de2" providerId="LiveId" clId="{C3594856-CEDA-5129-B2AF-7962E3CA4CA3}" dt="2026-06-24T09:17:33.008" v="4521" actId="1076"/>
-          <ac:spMkLst>
-            <pc:docMk/>
-            <pc:sldMk cId="3357630599" sldId="277"/>
-            <ac:spMk id="5" creationId="{E1F2CC37-57C3-C460-C13B-BAE5121F38F4}"/>
-          </ac:spMkLst>
-        </pc:spChg>
-        <pc:spChg chg="add mod">
-          <ac:chgData name="耀泉 马" userId="19e30af8d5659de2" providerId="LiveId" clId="{C3594856-CEDA-5129-B2AF-7962E3CA4CA3}" dt="2026-06-30T11:16:23.441" v="6895" actId="12"/>
-          <ac:spMkLst>
-            <pc:docMk/>
-            <pc:sldMk cId="3357630599" sldId="277"/>
-            <ac:spMk id="6" creationId="{1317F66F-F524-94AA-15D5-B44DC8A41F54}"/>
-          </ac:spMkLst>
-        </pc:spChg>
-      </pc:sldChg>
-      <pc:sldChg chg="modSp new mod modNotesTx">
-        <pc:chgData name="耀泉 马" userId="19e30af8d5659de2" providerId="LiveId" clId="{C3594856-CEDA-5129-B2AF-7962E3CA4CA3}" dt="2026-06-29T09:22:52.826" v="5654" actId="20577"/>
-        <pc:sldMkLst>
-          <pc:docMk/>
-          <pc:sldMk cId="1889331192" sldId="278"/>
-        </pc:sldMkLst>
-        <pc:spChg chg="mod">
-          <ac:chgData name="耀泉 马" userId="19e30af8d5659de2" providerId="LiveId" clId="{C3594856-CEDA-5129-B2AF-7962E3CA4CA3}" dt="2026-06-28T21:44:30.848" v="4749" actId="20577"/>
-          <ac:spMkLst>
-            <pc:docMk/>
-            <pc:sldMk cId="1889331192" sldId="278"/>
-            <ac:spMk id="2" creationId="{59716C91-DA0F-3209-59F3-03768EF7094B}"/>
-          </ac:spMkLst>
-        </pc:spChg>
-        <pc:spChg chg="mod">
-          <ac:chgData name="耀泉 马" userId="19e30af8d5659de2" providerId="LiveId" clId="{C3594856-CEDA-5129-B2AF-7962E3CA4CA3}" dt="2026-06-28T22:17:50.292" v="5339" actId="20577"/>
-          <ac:spMkLst>
-            <pc:docMk/>
-            <pc:sldMk cId="1889331192" sldId="278"/>
-            <ac:spMk id="3" creationId="{6AC20E5C-AFA6-63E9-F3E3-598B4C9250D6}"/>
-          </ac:spMkLst>
-        </pc:spChg>
-      </pc:sldChg>
-      <pc:sldChg chg="modSp new mod ord modNotesTx">
-        <pc:chgData name="耀泉 马" userId="19e30af8d5659de2" providerId="LiveId" clId="{C3594856-CEDA-5129-B2AF-7962E3CA4CA3}" dt="2026-06-30T14:25:46.361" v="7016" actId="20578"/>
-        <pc:sldMkLst>
-          <pc:docMk/>
-          <pc:sldMk cId="3878286925" sldId="279"/>
-        </pc:sldMkLst>
-        <pc:spChg chg="mod">
-          <ac:chgData name="耀泉 马" userId="19e30af8d5659de2" providerId="LiveId" clId="{C3594856-CEDA-5129-B2AF-7962E3CA4CA3}" dt="2026-06-28T22:10:11.838" v="5258" actId="20577"/>
-          <ac:spMkLst>
-            <pc:docMk/>
-            <pc:sldMk cId="3878286925" sldId="279"/>
-            <ac:spMk id="2" creationId="{CA31E5F6-F144-20C4-34AE-08DC1D3AC1B6}"/>
-          </ac:spMkLst>
-        </pc:spChg>
-        <pc:spChg chg="mod">
-          <ac:chgData name="耀泉 马" userId="19e30af8d5659de2" providerId="LiveId" clId="{C3594856-CEDA-5129-B2AF-7962E3CA4CA3}" dt="2026-06-30T14:25:46.361" v="7016" actId="20578"/>
-          <ac:spMkLst>
-            <pc:docMk/>
-            <pc:sldMk cId="3878286925" sldId="279"/>
-            <ac:spMk id="3" creationId="{217C9513-F214-B754-0E04-F02550B4AEB8}"/>
-          </ac:spMkLst>
-        </pc:spChg>
-      </pc:sldChg>
-      <pc:sldChg chg="modSp new mod">
-        <pc:chgData name="耀泉 马" userId="19e30af8d5659de2" providerId="LiveId" clId="{C3594856-CEDA-5129-B2AF-7962E3CA4CA3}" dt="2026-06-30T11:54:24.585" v="6991" actId="27636"/>
-        <pc:sldMkLst>
-          <pc:docMk/>
-          <pc:sldMk cId="1240350489" sldId="280"/>
-        </pc:sldMkLst>
-        <pc:spChg chg="mod">
-          <ac:chgData name="耀泉 马" userId="19e30af8d5659de2" providerId="LiveId" clId="{C3594856-CEDA-5129-B2AF-7962E3CA4CA3}" dt="2026-06-29T09:57:08.179" v="5669" actId="20577"/>
-          <ac:spMkLst>
-            <pc:docMk/>
-            <pc:sldMk cId="1240350489" sldId="280"/>
-            <ac:spMk id="2" creationId="{2623349F-0A32-91C9-5511-C31BB491137D}"/>
-          </ac:spMkLst>
-        </pc:spChg>
-        <pc:spChg chg="mod">
-          <ac:chgData name="耀泉 马" userId="19e30af8d5659de2" providerId="LiveId" clId="{C3594856-CEDA-5129-B2AF-7962E3CA4CA3}" dt="2026-06-30T11:54:24.585" v="6991" actId="27636"/>
-          <ac:spMkLst>
-            <pc:docMk/>
-            <pc:sldMk cId="1240350489" sldId="280"/>
-            <ac:spMk id="3" creationId="{0A6FBED9-155A-A5D4-662C-4DBDA51995E4}"/>
-          </ac:spMkLst>
-        </pc:spChg>
-      </pc:sldChg>
-      <pc:sldChg chg="modSp new mod">
-        <pc:chgData name="耀泉 马" userId="19e30af8d5659de2" providerId="LiveId" clId="{C3594856-CEDA-5129-B2AF-7962E3CA4CA3}" dt="2026-06-30T10:25:41.295" v="6838" actId="20577"/>
-        <pc:sldMkLst>
-          <pc:docMk/>
-          <pc:sldMk cId="855165380" sldId="281"/>
-        </pc:sldMkLst>
-        <pc:spChg chg="mod">
-          <ac:chgData name="耀泉 马" userId="19e30af8d5659de2" providerId="LiveId" clId="{C3594856-CEDA-5129-B2AF-7962E3CA4CA3}" dt="2026-06-29T14:56:48.220" v="5925" actId="20577"/>
-          <ac:spMkLst>
-            <pc:docMk/>
-            <pc:sldMk cId="855165380" sldId="281"/>
-            <ac:spMk id="2" creationId="{2D2C3582-B1A7-2F28-1B83-E777340F4A99}"/>
-          </ac:spMkLst>
-        </pc:spChg>
-        <pc:spChg chg="mod">
-          <ac:chgData name="耀泉 马" userId="19e30af8d5659de2" providerId="LiveId" clId="{C3594856-CEDA-5129-B2AF-7962E3CA4CA3}" dt="2026-06-30T10:25:41.295" v="6838" actId="20577"/>
-          <ac:spMkLst>
-            <pc:docMk/>
-            <pc:sldMk cId="855165380" sldId="281"/>
-            <ac:spMk id="3" creationId="{F01B0525-4D77-F3BB-DBFB-298722C35A5A}"/>
-          </ac:spMkLst>
-        </pc:spChg>
       </pc:sldChg>
     </pc:docChg>
   </pc:docChgLst>
@@ -676,7 +279,7 @@
           <a:p>
             <a:fld id="{D942D6C0-7D9E-504D-94AD-D6B570192357}" type="datetimeFigureOut">
               <a:rPr lang="en-US" smtClean="0"/>
-              <a:t>6/28/26</a:t>
+              <a:t>8/3/26</a:t>
             </a:fld>
             <a:endParaRPr lang="en-US"/>
           </a:p>
@@ -2675,7 +2278,7 @@
           <a:p>
             <a:fld id="{66953C98-49B1-1049-AD13-A5C3FE863A09}" type="datetime1">
               <a:rPr lang="en-GB" smtClean="0"/>
-              <a:t>28/06/2026</a:t>
+              <a:t>03/08/2026</a:t>
             </a:fld>
             <a:endParaRPr lang="en-US"/>
           </a:p>
@@ -2878,7 +2481,7 @@
           <a:p>
             <a:fld id="{634C675B-64FF-9C44-A019-CB02FE026880}" type="datetime1">
               <a:rPr lang="en-GB" smtClean="0"/>
-              <a:t>28/06/2026</a:t>
+              <a:t>03/08/2026</a:t>
             </a:fld>
             <a:endParaRPr lang="en-US"/>
           </a:p>
@@ -3091,7 +2694,7 @@
           <a:p>
             <a:fld id="{E9F3AEB0-98D9-D940-B26E-D6A1ED65D91A}" type="datetime1">
               <a:rPr lang="en-GB" smtClean="0"/>
-              <a:t>28/06/2026</a:t>
+              <a:t>03/08/2026</a:t>
             </a:fld>
             <a:endParaRPr lang="en-US"/>
           </a:p>
@@ -3294,7 +2897,7 @@
           <a:p>
             <a:fld id="{74B74ED2-CD06-C640-B058-524353BA429A}" type="datetime1">
               <a:rPr lang="en-GB" smtClean="0"/>
-              <a:t>28/06/2026</a:t>
+              <a:t>03/08/2026</a:t>
             </a:fld>
             <a:endParaRPr lang="en-US"/>
           </a:p>
@@ -3573,7 +3176,7 @@
           <a:p>
             <a:fld id="{3C668EC3-48D0-F24D-BCEF-46DD66DDB969}" type="datetime1">
               <a:rPr lang="en-GB" smtClean="0"/>
-              <a:t>28/06/2026</a:t>
+              <a:t>03/08/2026</a:t>
             </a:fld>
             <a:endParaRPr lang="en-US"/>
           </a:p>
@@ -3844,7 +3447,7 @@
           <a:p>
             <a:fld id="{C1E697FC-8A6E-1942-A4C2-502684F162C1}" type="datetime1">
               <a:rPr lang="en-GB" smtClean="0"/>
-              <a:t>28/06/2026</a:t>
+              <a:t>03/08/2026</a:t>
             </a:fld>
             <a:endParaRPr lang="en-US"/>
           </a:p>
@@ -4262,7 +3865,7 @@
           <a:p>
             <a:fld id="{72A424FF-AF90-2E46-A679-3B9EBE55933D}" type="datetime1">
               <a:rPr lang="en-GB" smtClean="0"/>
-              <a:t>28/06/2026</a:t>
+              <a:t>03/08/2026</a:t>
             </a:fld>
             <a:endParaRPr lang="en-US"/>
           </a:p>
@@ -4407,7 +4010,7 @@
           <a:p>
             <a:fld id="{C9DA4DDD-11EB-F246-AB7A-9CEDEADBD1E3}" type="datetime1">
               <a:rPr lang="en-GB" smtClean="0"/>
-              <a:t>28/06/2026</a:t>
+              <a:t>03/08/2026</a:t>
             </a:fld>
             <a:endParaRPr lang="en-US"/>
           </a:p>
@@ -4523,7 +4126,7 @@
           <a:p>
             <a:fld id="{8C9D5473-7AAD-CB46-A9CF-E0F92F18C158}" type="datetime1">
               <a:rPr lang="en-GB" smtClean="0"/>
-              <a:t>28/06/2026</a:t>
+              <a:t>03/08/2026</a:t>
             </a:fld>
             <a:endParaRPr lang="en-US"/>
           </a:p>
@@ -4839,7 +4442,7 @@
           <a:p>
             <a:fld id="{3AC58F6D-3F4A-DB48-AF7B-AA25146E46B7}" type="datetime1">
               <a:rPr lang="en-GB" smtClean="0"/>
-              <a:t>28/06/2026</a:t>
+              <a:t>03/08/2026</a:t>
             </a:fld>
             <a:endParaRPr lang="en-US"/>
           </a:p>
@@ -5131,7 +4734,7 @@
           <a:p>
             <a:fld id="{BAAC4FA6-ECCF-2748-B4C7-F5C8FE9BC957}" type="datetime1">
               <a:rPr lang="en-GB" smtClean="0"/>
-              <a:t>28/06/2026</a:t>
+              <a:t>03/08/2026</a:t>
             </a:fld>
             <a:endParaRPr lang="en-US"/>
           </a:p>
@@ -5377,7 +4980,7 @@
           <a:p>
             <a:fld id="{2BDDA0CB-5523-1E42-87CA-252FAC812744}" type="datetime1">
               <a:rPr lang="en-GB" smtClean="0"/>
-              <a:t>28/06/2026</a:t>
+              <a:t>03/08/2026</a:t>
             </a:fld>
             <a:endParaRPr lang="en-US"/>
           </a:p>
@@ -11336,7 +10939,7 @@
         </p:blipFill>
         <p:spPr>
           <a:xfrm>
-            <a:off x="5633467" y="1690688"/>
+            <a:off x="5687255" y="1690688"/>
             <a:ext cx="5938802" cy="3508036"/>
           </a:xfrm>
           <a:prstGeom prst="rect">
